--- a/스크립트언어/2021182014 박신우 숙제3. DFS & BFS.pptx
+++ b/스크립트언어/2021182014 박신우 숙제3. DFS & BFS.pptx
@@ -5,7 +5,7 @@
     <p:sldMasterId id="2147483684" r:id="rId1"/>
   </p:sldMasterIdLst>
   <p:notesMasterIdLst>
-    <p:notesMasterId r:id="rId15"/>
+    <p:notesMasterId r:id="rId19"/>
   </p:notesMasterIdLst>
   <p:sldIdLst>
     <p:sldId id="258" r:id="rId2"/>
@@ -13,14 +13,18 @@
     <p:sldId id="335" r:id="rId4"/>
     <p:sldId id="259" r:id="rId5"/>
     <p:sldId id="336" r:id="rId6"/>
-    <p:sldId id="337" r:id="rId7"/>
-    <p:sldId id="339" r:id="rId8"/>
-    <p:sldId id="345" r:id="rId9"/>
-    <p:sldId id="346" r:id="rId10"/>
-    <p:sldId id="341" r:id="rId11"/>
-    <p:sldId id="343" r:id="rId12"/>
-    <p:sldId id="344" r:id="rId13"/>
-    <p:sldId id="342" r:id="rId14"/>
+    <p:sldId id="350" r:id="rId7"/>
+    <p:sldId id="337" r:id="rId8"/>
+    <p:sldId id="339" r:id="rId9"/>
+    <p:sldId id="345" r:id="rId10"/>
+    <p:sldId id="346" r:id="rId11"/>
+    <p:sldId id="341" r:id="rId12"/>
+    <p:sldId id="347" r:id="rId13"/>
+    <p:sldId id="343" r:id="rId14"/>
+    <p:sldId id="348" r:id="rId15"/>
+    <p:sldId id="344" r:id="rId16"/>
+    <p:sldId id="342" r:id="rId17"/>
+    <p:sldId id="349" r:id="rId18"/>
   </p:sldIdLst>
   <p:sldSz cx="9144000" cy="6858000" type="screen4x3"/>
   <p:notesSz cx="6796088" cy="9926638"/>
@@ -280,7 +284,7 @@
               <a:pPr>
                 <a:defRPr/>
               </a:pPr>
-              <a:t>2026-04-01</a:t>
+              <a:t>2026-04-09</a:t>
             </a:fld>
             <a:endParaRPr lang="ko-KR" altLang="en-US"/>
           </a:p>
@@ -970,7 +974,7 @@
               <a:pPr>
                 <a:defRPr/>
               </a:pPr>
-              <a:t>12</a:t>
+              <a:t>15</a:t>
             </a:fld>
             <a:endParaRPr lang="ko-KR" altLang="en-US"/>
           </a:p>
@@ -1084,7 +1088,7 @@
               <a:pPr>
                 <a:defRPr/>
               </a:pPr>
-              <a:t>13</a:t>
+              <a:t>16</a:t>
             </a:fld>
             <a:endParaRPr lang="ko-KR" altLang="en-US"/>
           </a:p>
@@ -2195,7 +2199,7 @@
               <a:pPr>
                 <a:defRPr/>
               </a:pPr>
-              <a:t>6</a:t>
+              <a:t>7</a:t>
             </a:fld>
             <a:endParaRPr lang="ko-KR" altLang="en-US"/>
           </a:p>
@@ -2309,7 +2313,7 @@
               <a:pPr>
                 <a:defRPr/>
               </a:pPr>
-              <a:t>7</a:t>
+              <a:t>8</a:t>
             </a:fld>
             <a:endParaRPr lang="ko-KR" altLang="en-US"/>
           </a:p>
@@ -2423,7 +2427,7 @@
               <a:pPr>
                 <a:defRPr/>
               </a:pPr>
-              <a:t>10</a:t>
+              <a:t>11</a:t>
             </a:fld>
             <a:endParaRPr lang="ko-KR" altLang="en-US"/>
           </a:p>
@@ -2537,7 +2541,7 @@
               <a:pPr>
                 <a:defRPr/>
               </a:pPr>
-              <a:t>11</a:t>
+              <a:t>13</a:t>
             </a:fld>
             <a:endParaRPr lang="ko-KR" altLang="en-US"/>
           </a:p>
@@ -7082,6 +7086,276 @@
   <p:cSld>
     <p:spTree>
       <p:nvGrpSpPr>
+        <p:cNvPr id="1" name=""/>
+        <p:cNvGrpSpPr/>
+        <p:nvPr/>
+      </p:nvGrpSpPr>
+      <p:grpSpPr>
+        <a:xfrm>
+          <a:off x="0" y="0"/>
+          <a:ext cx="0" cy="0"/>
+          <a:chOff x="0" y="0"/>
+          <a:chExt cx="0" cy="0"/>
+        </a:xfrm>
+      </p:grpSpPr>
+      <p:sp>
+        <p:nvSpPr>
+          <p:cNvPr id="2" name="제목 1">
+            <a:extLst>
+              <a:ext uri="{FF2B5EF4-FFF2-40B4-BE49-F238E27FC236}">
+                <a16:creationId xmlns:a16="http://schemas.microsoft.com/office/drawing/2014/main" id="{BFE13D73-23DE-A052-A63D-D7AED4824A96}"/>
+              </a:ext>
+            </a:extLst>
+          </p:cNvPr>
+          <p:cNvSpPr>
+            <a:spLocks noGrp="1"/>
+          </p:cNvSpPr>
+          <p:nvPr>
+            <p:ph type="title"/>
+          </p:nvPr>
+        </p:nvSpPr>
+        <p:spPr/>
+        <p:txBody>
+          <a:bodyPr/>
+          <a:lstStyle/>
+          <a:p>
+            <a:r>
+              <a:rPr lang="en-US" altLang="ko-KR" dirty="0"/>
+              <a:t>3. </a:t>
+            </a:r>
+            <a:r>
+              <a:rPr lang="ko-KR" altLang="en-US" dirty="0"/>
+              <a:t>중요한 교차로 </a:t>
+            </a:r>
+            <a:r>
+              <a:rPr lang="en-US" altLang="ko-KR" dirty="0"/>
+              <a:t>(</a:t>
+            </a:r>
+            <a:r>
+              <a:rPr lang="en-US" altLang="ko-KR" dirty="0" err="1"/>
+              <a:t>TUKorea</a:t>
+            </a:r>
+            <a:r>
+              <a:rPr lang="en-US" altLang="ko-KR" dirty="0"/>
+              <a:t>, DFS/BFS</a:t>
+            </a:r>
+            <a:r>
+              <a:rPr lang="ko-KR" altLang="en-US" dirty="0"/>
+              <a:t>완전탐색</a:t>
+            </a:r>
+            <a:r>
+              <a:rPr lang="en-US" altLang="ko-KR" dirty="0"/>
+              <a:t>)</a:t>
+            </a:r>
+            <a:endParaRPr lang="ko-KR" altLang="en-US" dirty="0"/>
+          </a:p>
+        </p:txBody>
+      </p:sp>
+      <p:pic>
+        <p:nvPicPr>
+          <p:cNvPr id="7" name="내용 개체 틀 6">
+            <a:extLst>
+              <a:ext uri="{FF2B5EF4-FFF2-40B4-BE49-F238E27FC236}">
+                <a16:creationId xmlns:a16="http://schemas.microsoft.com/office/drawing/2014/main" id="{A30F3F89-2BB6-B309-8B73-F52FA5140DAD}"/>
+              </a:ext>
+            </a:extLst>
+          </p:cNvPr>
+          <p:cNvPicPr>
+            <a:picLocks noGrp="1" noChangeAspect="1"/>
+          </p:cNvPicPr>
+          <p:nvPr>
+            <p:ph idx="1"/>
+          </p:nvPr>
+        </p:nvPicPr>
+        <p:blipFill>
+          <a:blip r:embed="rId2"/>
+          <a:stretch>
+            <a:fillRect/>
+          </a:stretch>
+        </p:blipFill>
+        <p:spPr bwMode="auto">
+          <a:xfrm>
+            <a:off x="971600" y="1142984"/>
+            <a:ext cx="3474541" cy="4840288"/>
+          </a:xfrm>
+          <a:prstGeom prst="rect">
+            <a:avLst/>
+          </a:prstGeom>
+          <a:noFill/>
+          <a:ln>
+            <a:noFill/>
+          </a:ln>
+          <a:extLst>
+            <a:ext uri="{909E8E84-426E-40DD-AFC4-6F175D3DCCD1}">
+              <a14:hiddenFill xmlns:a14="http://schemas.microsoft.com/office/drawing/2010/main">
+                <a:solidFill>
+                  <a:srgbClr val="FFFFFF"/>
+                </a:solidFill>
+              </a14:hiddenFill>
+            </a:ext>
+            <a:ext uri="{91240B29-F687-4F45-9708-019B960494DF}">
+              <a14:hiddenLine xmlns:a14="http://schemas.microsoft.com/office/drawing/2010/main" w="9525">
+                <a:solidFill>
+                  <a:srgbClr val="000000"/>
+                </a:solidFill>
+                <a:miter lim="800000"/>
+                <a:headEnd/>
+                <a:tailEnd/>
+              </a14:hiddenLine>
+            </a:ext>
+          </a:extLst>
+        </p:spPr>
+      </p:pic>
+      <p:sp>
+        <p:nvSpPr>
+          <p:cNvPr id="4" name="날짜 개체 틀 3">
+            <a:extLst>
+              <a:ext uri="{FF2B5EF4-FFF2-40B4-BE49-F238E27FC236}">
+                <a16:creationId xmlns:a16="http://schemas.microsoft.com/office/drawing/2014/main" id="{50267631-2A3D-06FE-9C3C-B2AA5B3A7A84}"/>
+              </a:ext>
+            </a:extLst>
+          </p:cNvPr>
+          <p:cNvSpPr>
+            <a:spLocks noGrp="1"/>
+          </p:cNvSpPr>
+          <p:nvPr>
+            <p:ph type="dt" sz="half" idx="10"/>
+          </p:nvPr>
+        </p:nvSpPr>
+        <p:spPr/>
+        <p:txBody>
+          <a:bodyPr/>
+          <a:lstStyle/>
+          <a:p>
+            <a:pPr>
+              <a:defRPr/>
+            </a:pPr>
+            <a:r>
+              <a:rPr lang="en-US" altLang="ko-KR"/>
+              <a:t>2008</a:t>
+            </a:r>
+            <a:r>
+              <a:rPr lang="ko-KR" altLang="en-US"/>
+              <a:t>년</a:t>
+            </a:r>
+            <a:r>
+              <a:rPr lang="en-US" altLang="ko-KR"/>
+              <a:t>2</a:t>
+            </a:r>
+            <a:r>
+              <a:rPr lang="ko-KR" altLang="en-US"/>
+              <a:t>학기 </a:t>
+            </a:r>
+            <a:r>
+              <a:rPr lang="en-US" altLang="ko-KR"/>
+              <a:t>3D</a:t>
+            </a:r>
+            <a:r>
+              <a:rPr lang="ko-KR" altLang="en-US"/>
+              <a:t>게임프로그래밍</a:t>
+            </a:r>
+            <a:r>
+              <a:rPr lang="en-US" altLang="ko-KR"/>
+              <a:t>II </a:t>
+            </a:r>
+            <a:r>
+              <a:rPr lang="ko-KR" altLang="en-US"/>
+              <a:t>담당교수</a:t>
+            </a:r>
+            <a:r>
+              <a:rPr lang="en-US" altLang="ko-KR"/>
+              <a:t>:</a:t>
+            </a:r>
+            <a:r>
+              <a:rPr lang="ko-KR" altLang="en-US"/>
+              <a:t>김영식</a:t>
+            </a:r>
+          </a:p>
+        </p:txBody>
+      </p:sp>
+      <p:sp>
+        <p:nvSpPr>
+          <p:cNvPr id="5" name="슬라이드 번호 개체 틀 4">
+            <a:extLst>
+              <a:ext uri="{FF2B5EF4-FFF2-40B4-BE49-F238E27FC236}">
+                <a16:creationId xmlns:a16="http://schemas.microsoft.com/office/drawing/2014/main" id="{FD0E14D5-43FE-F8AE-47E9-6FEC757F62A2}"/>
+              </a:ext>
+            </a:extLst>
+          </p:cNvPr>
+          <p:cNvSpPr>
+            <a:spLocks noGrp="1"/>
+          </p:cNvSpPr>
+          <p:nvPr>
+            <p:ph type="sldNum" sz="quarter" idx="12"/>
+          </p:nvPr>
+        </p:nvSpPr>
+        <p:spPr/>
+        <p:txBody>
+          <a:bodyPr/>
+          <a:lstStyle/>
+          <a:p>
+            <a:pPr>
+              <a:defRPr/>
+            </a:pPr>
+            <a:fld id="{A268DA64-E15D-4814-A1DA-86D92D550423}" type="slidenum">
+              <a:rPr lang="ko-KR" altLang="en-US" smtClean="0"/>
+              <a:pPr>
+                <a:defRPr/>
+              </a:pPr>
+              <a:t>10</a:t>
+            </a:fld>
+            <a:endParaRPr lang="ko-KR" altLang="en-US"/>
+          </a:p>
+        </p:txBody>
+      </p:sp>
+      <p:pic>
+        <p:nvPicPr>
+          <p:cNvPr id="9" name="그림 8">
+            <a:extLst>
+              <a:ext uri="{FF2B5EF4-FFF2-40B4-BE49-F238E27FC236}">
+                <a16:creationId xmlns:a16="http://schemas.microsoft.com/office/drawing/2014/main" id="{7FE143F9-B5B7-8985-67B3-A1FF53494A65}"/>
+              </a:ext>
+            </a:extLst>
+          </p:cNvPr>
+          <p:cNvPicPr>
+            <a:picLocks noChangeAspect="1"/>
+          </p:cNvPicPr>
+          <p:nvPr/>
+        </p:nvPicPr>
+        <p:blipFill>
+          <a:blip r:embed="rId3"/>
+          <a:stretch>
+            <a:fillRect/>
+          </a:stretch>
+        </p:blipFill>
+        <p:spPr>
+          <a:xfrm>
+            <a:off x="4499992" y="2132856"/>
+            <a:ext cx="4336725" cy="3729730"/>
+          </a:xfrm>
+          <a:prstGeom prst="rect">
+            <a:avLst/>
+          </a:prstGeom>
+        </p:spPr>
+      </p:pic>
+    </p:spTree>
+    <p:extLst>
+      <p:ext uri="{BB962C8B-B14F-4D97-AF65-F5344CB8AC3E}">
+        <p14:creationId xmlns:p14="http://schemas.microsoft.com/office/powerpoint/2010/main" val="3719326584"/>
+      </p:ext>
+    </p:extLst>
+  </p:cSld>
+  <p:clrMapOvr>
+    <a:masterClrMapping/>
+  </p:clrMapOvr>
+</p:sld>
+</file>
+
+<file path=ppt/slides/slide11.xml><?xml version="1.0" encoding="utf-8"?>
+<p:sld xmlns:a="http://schemas.openxmlformats.org/drawingml/2006/main" xmlns:r="http://schemas.openxmlformats.org/officeDocument/2006/relationships" xmlns:p="http://schemas.openxmlformats.org/presentationml/2006/main">
+  <p:cSld>
+    <p:spTree>
+      <p:nvGrpSpPr>
         <p:cNvPr id="1" name="">
           <a:extLst>
             <a:ext uri="{FF2B5EF4-FFF2-40B4-BE49-F238E27FC236}">
@@ -7244,7 +7518,7 @@
               <a:pPr>
                 <a:defRPr/>
               </a:pPr>
-              <a:t>10</a:t>
+              <a:t>11</a:t>
             </a:fld>
             <a:endParaRPr lang="ko-KR" altLang="en-US"/>
           </a:p>
@@ -7489,7 +7763,261 @@
 </p:sld>
 </file>
 
-<file path=ppt/slides/slide11.xml><?xml version="1.0" encoding="utf-8"?>
+<file path=ppt/slides/slide12.xml><?xml version="1.0" encoding="utf-8"?>
+<p:sld xmlns:a="http://schemas.openxmlformats.org/drawingml/2006/main" xmlns:r="http://schemas.openxmlformats.org/officeDocument/2006/relationships" xmlns:p="http://schemas.openxmlformats.org/presentationml/2006/main">
+  <p:cSld>
+    <p:spTree>
+      <p:nvGrpSpPr>
+        <p:cNvPr id="1" name=""/>
+        <p:cNvGrpSpPr/>
+        <p:nvPr/>
+      </p:nvGrpSpPr>
+      <p:grpSpPr>
+        <a:xfrm>
+          <a:off x="0" y="0"/>
+          <a:ext cx="0" cy="0"/>
+          <a:chOff x="0" y="0"/>
+          <a:chExt cx="0" cy="0"/>
+        </a:xfrm>
+      </p:grpSpPr>
+      <p:sp>
+        <p:nvSpPr>
+          <p:cNvPr id="2" name="제목 1">
+            <a:extLst>
+              <a:ext uri="{FF2B5EF4-FFF2-40B4-BE49-F238E27FC236}">
+                <a16:creationId xmlns:a16="http://schemas.microsoft.com/office/drawing/2014/main" id="{981DF719-E2A2-05CF-C611-50936C726592}"/>
+              </a:ext>
+            </a:extLst>
+          </p:cNvPr>
+          <p:cNvSpPr>
+            <a:spLocks noGrp="1"/>
+          </p:cNvSpPr>
+          <p:nvPr>
+            <p:ph type="title"/>
+          </p:nvPr>
+        </p:nvSpPr>
+        <p:spPr/>
+        <p:txBody>
+          <a:bodyPr/>
+          <a:lstStyle/>
+          <a:p>
+            <a:r>
+              <a:rPr lang="en-US" altLang="ko-KR" dirty="0"/>
+              <a:t>4. </a:t>
+            </a:r>
+            <a:r>
+              <a:rPr lang="ko-KR" altLang="en-US" dirty="0"/>
+              <a:t>여행경로</a:t>
+            </a:r>
+            <a:r>
+              <a:rPr lang="en-US" altLang="ko-KR" dirty="0"/>
+              <a:t>(Programmers, DFS)</a:t>
+            </a:r>
+            <a:endParaRPr lang="ko-KR" altLang="en-US" dirty="0"/>
+          </a:p>
+        </p:txBody>
+      </p:sp>
+      <p:pic>
+        <p:nvPicPr>
+          <p:cNvPr id="7" name="내용 개체 틀 6">
+            <a:extLst>
+              <a:ext uri="{FF2B5EF4-FFF2-40B4-BE49-F238E27FC236}">
+                <a16:creationId xmlns:a16="http://schemas.microsoft.com/office/drawing/2014/main" id="{959008E0-7FCF-8213-539E-FDDDD2C15116}"/>
+              </a:ext>
+            </a:extLst>
+          </p:cNvPr>
+          <p:cNvPicPr>
+            <a:picLocks noGrp="1" noChangeAspect="1"/>
+          </p:cNvPicPr>
+          <p:nvPr>
+            <p:ph idx="1"/>
+          </p:nvPr>
+        </p:nvPicPr>
+        <p:blipFill>
+          <a:blip r:embed="rId2"/>
+          <a:stretch>
+            <a:fillRect/>
+          </a:stretch>
+        </p:blipFill>
+        <p:spPr bwMode="auto">
+          <a:xfrm>
+            <a:off x="382817" y="1196752"/>
+            <a:ext cx="4189183" cy="4840288"/>
+          </a:xfrm>
+          <a:prstGeom prst="rect">
+            <a:avLst/>
+          </a:prstGeom>
+          <a:noFill/>
+          <a:ln>
+            <a:noFill/>
+          </a:ln>
+          <a:extLst>
+            <a:ext uri="{909E8E84-426E-40DD-AFC4-6F175D3DCCD1}">
+              <a14:hiddenFill xmlns:a14="http://schemas.microsoft.com/office/drawing/2010/main">
+                <a:solidFill>
+                  <a:srgbClr val="FFFFFF"/>
+                </a:solidFill>
+              </a14:hiddenFill>
+            </a:ext>
+            <a:ext uri="{91240B29-F687-4F45-9708-019B960494DF}">
+              <a14:hiddenLine xmlns:a14="http://schemas.microsoft.com/office/drawing/2010/main" w="9525">
+                <a:solidFill>
+                  <a:srgbClr val="000000"/>
+                </a:solidFill>
+                <a:miter lim="800000"/>
+                <a:headEnd/>
+                <a:tailEnd/>
+              </a14:hiddenLine>
+            </a:ext>
+          </a:extLst>
+        </p:spPr>
+      </p:pic>
+      <p:sp>
+        <p:nvSpPr>
+          <p:cNvPr id="4" name="날짜 개체 틀 3">
+            <a:extLst>
+              <a:ext uri="{FF2B5EF4-FFF2-40B4-BE49-F238E27FC236}">
+                <a16:creationId xmlns:a16="http://schemas.microsoft.com/office/drawing/2014/main" id="{4D5FE31C-868A-0B22-51EE-08EF3CE0DCDB}"/>
+              </a:ext>
+            </a:extLst>
+          </p:cNvPr>
+          <p:cNvSpPr>
+            <a:spLocks noGrp="1"/>
+          </p:cNvSpPr>
+          <p:nvPr>
+            <p:ph type="dt" sz="half" idx="10"/>
+          </p:nvPr>
+        </p:nvSpPr>
+        <p:spPr/>
+        <p:txBody>
+          <a:bodyPr/>
+          <a:lstStyle/>
+          <a:p>
+            <a:pPr>
+              <a:defRPr/>
+            </a:pPr>
+            <a:r>
+              <a:rPr lang="en-US" altLang="ko-KR"/>
+              <a:t>2008</a:t>
+            </a:r>
+            <a:r>
+              <a:rPr lang="ko-KR" altLang="en-US"/>
+              <a:t>년</a:t>
+            </a:r>
+            <a:r>
+              <a:rPr lang="en-US" altLang="ko-KR"/>
+              <a:t>2</a:t>
+            </a:r>
+            <a:r>
+              <a:rPr lang="ko-KR" altLang="en-US"/>
+              <a:t>학기 </a:t>
+            </a:r>
+            <a:r>
+              <a:rPr lang="en-US" altLang="ko-KR"/>
+              <a:t>3D</a:t>
+            </a:r>
+            <a:r>
+              <a:rPr lang="ko-KR" altLang="en-US"/>
+              <a:t>게임프로그래밍</a:t>
+            </a:r>
+            <a:r>
+              <a:rPr lang="en-US" altLang="ko-KR"/>
+              <a:t>II </a:t>
+            </a:r>
+            <a:r>
+              <a:rPr lang="ko-KR" altLang="en-US"/>
+              <a:t>담당교수</a:t>
+            </a:r>
+            <a:r>
+              <a:rPr lang="en-US" altLang="ko-KR"/>
+              <a:t>:</a:t>
+            </a:r>
+            <a:r>
+              <a:rPr lang="ko-KR" altLang="en-US"/>
+              <a:t>김영식</a:t>
+            </a:r>
+          </a:p>
+        </p:txBody>
+      </p:sp>
+      <p:sp>
+        <p:nvSpPr>
+          <p:cNvPr id="5" name="슬라이드 번호 개체 틀 4">
+            <a:extLst>
+              <a:ext uri="{FF2B5EF4-FFF2-40B4-BE49-F238E27FC236}">
+                <a16:creationId xmlns:a16="http://schemas.microsoft.com/office/drawing/2014/main" id="{2D7F83AC-E86D-433E-04C6-29B6CE18C4E0}"/>
+              </a:ext>
+            </a:extLst>
+          </p:cNvPr>
+          <p:cNvSpPr>
+            <a:spLocks noGrp="1"/>
+          </p:cNvSpPr>
+          <p:nvPr>
+            <p:ph type="sldNum" sz="quarter" idx="12"/>
+          </p:nvPr>
+        </p:nvSpPr>
+        <p:spPr/>
+        <p:txBody>
+          <a:bodyPr/>
+          <a:lstStyle/>
+          <a:p>
+            <a:pPr>
+              <a:defRPr/>
+            </a:pPr>
+            <a:fld id="{A268DA64-E15D-4814-A1DA-86D92D550423}" type="slidenum">
+              <a:rPr lang="ko-KR" altLang="en-US" smtClean="0"/>
+              <a:pPr>
+                <a:defRPr/>
+              </a:pPr>
+              <a:t>12</a:t>
+            </a:fld>
+            <a:endParaRPr lang="ko-KR" altLang="en-US"/>
+          </a:p>
+        </p:txBody>
+      </p:sp>
+      <p:pic>
+        <p:nvPicPr>
+          <p:cNvPr id="9" name="그림 8">
+            <a:extLst>
+              <a:ext uri="{FF2B5EF4-FFF2-40B4-BE49-F238E27FC236}">
+                <a16:creationId xmlns:a16="http://schemas.microsoft.com/office/drawing/2014/main" id="{7A5E6FCF-D285-27F5-7956-EDD1AAE94A5B}"/>
+              </a:ext>
+            </a:extLst>
+          </p:cNvPr>
+          <p:cNvPicPr>
+            <a:picLocks noChangeAspect="1"/>
+          </p:cNvPicPr>
+          <p:nvPr/>
+        </p:nvPicPr>
+        <p:blipFill>
+          <a:blip r:embed="rId3"/>
+          <a:stretch>
+            <a:fillRect/>
+          </a:stretch>
+        </p:blipFill>
+        <p:spPr>
+          <a:xfrm>
+            <a:off x="4589579" y="3284984"/>
+            <a:ext cx="4297256" cy="2158835"/>
+          </a:xfrm>
+          <a:prstGeom prst="rect">
+            <a:avLst/>
+          </a:prstGeom>
+        </p:spPr>
+      </p:pic>
+    </p:spTree>
+    <p:extLst>
+      <p:ext uri="{BB962C8B-B14F-4D97-AF65-F5344CB8AC3E}">
+        <p14:creationId xmlns:p14="http://schemas.microsoft.com/office/powerpoint/2010/main" val="3778842150"/>
+      </p:ext>
+    </p:extLst>
+  </p:cSld>
+  <p:clrMapOvr>
+    <a:masterClrMapping/>
+  </p:clrMapOvr>
+</p:sld>
+</file>
+
+<file path=ppt/slides/slide13.xml><?xml version="1.0" encoding="utf-8"?>
 <p:sld xmlns:a="http://schemas.openxmlformats.org/drawingml/2006/main" xmlns:r="http://schemas.openxmlformats.org/officeDocument/2006/relationships" xmlns:p="http://schemas.openxmlformats.org/presentationml/2006/main">
   <p:cSld>
     <p:spTree>
@@ -7855,7 +8383,7 @@
               <a:pPr>
                 <a:defRPr/>
               </a:pPr>
-              <a:t>11</a:t>
+              <a:t>13</a:t>
             </a:fld>
             <a:endParaRPr lang="ko-KR" altLang="en-US"/>
           </a:p>
@@ -7904,7 +8432,328 @@
 </p:sld>
 </file>
 
-<file path=ppt/slides/slide12.xml><?xml version="1.0" encoding="utf-8"?>
+<file path=ppt/slides/slide14.xml><?xml version="1.0" encoding="utf-8"?>
+<p:sld xmlns:a="http://schemas.openxmlformats.org/drawingml/2006/main" xmlns:r="http://schemas.openxmlformats.org/officeDocument/2006/relationships" xmlns:p="http://schemas.openxmlformats.org/presentationml/2006/main">
+  <p:cSld>
+    <p:spTree>
+      <p:nvGrpSpPr>
+        <p:cNvPr id="1" name=""/>
+        <p:cNvGrpSpPr/>
+        <p:nvPr/>
+      </p:nvGrpSpPr>
+      <p:grpSpPr>
+        <a:xfrm>
+          <a:off x="0" y="0"/>
+          <a:ext cx="0" cy="0"/>
+          <a:chOff x="0" y="0"/>
+          <a:chExt cx="0" cy="0"/>
+        </a:xfrm>
+      </p:grpSpPr>
+      <p:sp>
+        <p:nvSpPr>
+          <p:cNvPr id="2" name="제목 1">
+            <a:extLst>
+              <a:ext uri="{FF2B5EF4-FFF2-40B4-BE49-F238E27FC236}">
+                <a16:creationId xmlns:a16="http://schemas.microsoft.com/office/drawing/2014/main" id="{76E5622E-FBEE-ED6B-BD70-D048AC2E1B89}"/>
+              </a:ext>
+            </a:extLst>
+          </p:cNvPr>
+          <p:cNvSpPr>
+            <a:spLocks noGrp="1"/>
+          </p:cNvSpPr>
+          <p:nvPr>
+            <p:ph type="title"/>
+          </p:nvPr>
+        </p:nvSpPr>
+        <p:spPr>
+          <a:xfrm>
+            <a:off x="457200" y="274638"/>
+            <a:ext cx="8229600" cy="562074"/>
+          </a:xfrm>
+        </p:spPr>
+        <p:txBody>
+          <a:bodyPr/>
+          <a:lstStyle/>
+          <a:p>
+            <a:r>
+              <a:rPr lang="en-US" altLang="ko-KR" dirty="0"/>
+              <a:t>5. </a:t>
+            </a:r>
+            <a:r>
+              <a:rPr lang="ko-KR" altLang="en-US" dirty="0"/>
+              <a:t>알파벳 </a:t>
+            </a:r>
+            <a:r>
+              <a:rPr lang="en-US" altLang="ko-KR" dirty="0"/>
+              <a:t>(</a:t>
+            </a:r>
+            <a:r>
+              <a:rPr lang="ko-KR" altLang="en-US" dirty="0"/>
+              <a:t>백준</a:t>
+            </a:r>
+            <a:r>
+              <a:rPr lang="en-US" altLang="ko-KR" dirty="0"/>
+              <a:t>, DFS</a:t>
+            </a:r>
+            <a:r>
+              <a:rPr lang="ko-KR" altLang="en-US" dirty="0"/>
+              <a:t>재귀</a:t>
+            </a:r>
+            <a:r>
+              <a:rPr lang="en-US" altLang="ko-KR" dirty="0"/>
+              <a:t>, </a:t>
+            </a:r>
+            <a:r>
+              <a:rPr lang="ko-KR" altLang="en-US" dirty="0" err="1"/>
+              <a:t>백트레킹</a:t>
+            </a:r>
+            <a:r>
+              <a:rPr lang="en-US" altLang="ko-KR" dirty="0"/>
+              <a:t>, </a:t>
+            </a:r>
+            <a:r>
+              <a:rPr lang="ko-KR" altLang="en-US" dirty="0" err="1"/>
+              <a:t>비트마스킹</a:t>
+            </a:r>
+            <a:r>
+              <a:rPr lang="en-US" altLang="ko-KR" dirty="0"/>
+              <a:t>)</a:t>
+            </a:r>
+            <a:endParaRPr lang="ko-KR" altLang="en-US" dirty="0"/>
+          </a:p>
+        </p:txBody>
+      </p:sp>
+      <p:pic>
+        <p:nvPicPr>
+          <p:cNvPr id="7" name="내용 개체 틀 6">
+            <a:extLst>
+              <a:ext uri="{FF2B5EF4-FFF2-40B4-BE49-F238E27FC236}">
+                <a16:creationId xmlns:a16="http://schemas.microsoft.com/office/drawing/2014/main" id="{12D1A743-2366-1678-AF7F-A8C0D01FEE24}"/>
+              </a:ext>
+            </a:extLst>
+          </p:cNvPr>
+          <p:cNvPicPr>
+            <a:picLocks noGrp="1" noChangeAspect="1"/>
+          </p:cNvPicPr>
+          <p:nvPr>
+            <p:ph idx="1"/>
+          </p:nvPr>
+        </p:nvPicPr>
+        <p:blipFill>
+          <a:blip r:embed="rId2"/>
+          <a:stretch>
+            <a:fillRect/>
+          </a:stretch>
+        </p:blipFill>
+        <p:spPr bwMode="auto">
+          <a:xfrm>
+            <a:off x="450574" y="1120472"/>
+            <a:ext cx="8229600" cy="782370"/>
+          </a:xfrm>
+          <a:prstGeom prst="rect">
+            <a:avLst/>
+          </a:prstGeom>
+          <a:noFill/>
+          <a:ln>
+            <a:noFill/>
+          </a:ln>
+          <a:extLst>
+            <a:ext uri="{909E8E84-426E-40DD-AFC4-6F175D3DCCD1}">
+              <a14:hiddenFill xmlns:a14="http://schemas.microsoft.com/office/drawing/2010/main">
+                <a:solidFill>
+                  <a:srgbClr val="FFFFFF"/>
+                </a:solidFill>
+              </a14:hiddenFill>
+            </a:ext>
+            <a:ext uri="{91240B29-F687-4F45-9708-019B960494DF}">
+              <a14:hiddenLine xmlns:a14="http://schemas.microsoft.com/office/drawing/2010/main" w="9525">
+                <a:solidFill>
+                  <a:srgbClr val="000000"/>
+                </a:solidFill>
+                <a:miter lim="800000"/>
+                <a:headEnd/>
+                <a:tailEnd/>
+              </a14:hiddenLine>
+            </a:ext>
+          </a:extLst>
+        </p:spPr>
+      </p:pic>
+      <p:sp>
+        <p:nvSpPr>
+          <p:cNvPr id="4" name="날짜 개체 틀 3">
+            <a:extLst>
+              <a:ext uri="{FF2B5EF4-FFF2-40B4-BE49-F238E27FC236}">
+                <a16:creationId xmlns:a16="http://schemas.microsoft.com/office/drawing/2014/main" id="{7533DFBF-2CA7-1975-9559-D3A684096B91}"/>
+              </a:ext>
+            </a:extLst>
+          </p:cNvPr>
+          <p:cNvSpPr>
+            <a:spLocks noGrp="1"/>
+          </p:cNvSpPr>
+          <p:nvPr>
+            <p:ph type="dt" sz="half" idx="10"/>
+          </p:nvPr>
+        </p:nvSpPr>
+        <p:spPr/>
+        <p:txBody>
+          <a:bodyPr/>
+          <a:lstStyle/>
+          <a:p>
+            <a:pPr>
+              <a:defRPr/>
+            </a:pPr>
+            <a:r>
+              <a:rPr lang="en-US" altLang="ko-KR"/>
+              <a:t>2008</a:t>
+            </a:r>
+            <a:r>
+              <a:rPr lang="ko-KR" altLang="en-US"/>
+              <a:t>년</a:t>
+            </a:r>
+            <a:r>
+              <a:rPr lang="en-US" altLang="ko-KR"/>
+              <a:t>2</a:t>
+            </a:r>
+            <a:r>
+              <a:rPr lang="ko-KR" altLang="en-US"/>
+              <a:t>학기 </a:t>
+            </a:r>
+            <a:r>
+              <a:rPr lang="en-US" altLang="ko-KR"/>
+              <a:t>3D</a:t>
+            </a:r>
+            <a:r>
+              <a:rPr lang="ko-KR" altLang="en-US"/>
+              <a:t>게임프로그래밍</a:t>
+            </a:r>
+            <a:r>
+              <a:rPr lang="en-US" altLang="ko-KR"/>
+              <a:t>II </a:t>
+            </a:r>
+            <a:r>
+              <a:rPr lang="ko-KR" altLang="en-US"/>
+              <a:t>담당교수</a:t>
+            </a:r>
+            <a:r>
+              <a:rPr lang="en-US" altLang="ko-KR"/>
+              <a:t>:</a:t>
+            </a:r>
+            <a:r>
+              <a:rPr lang="ko-KR" altLang="en-US"/>
+              <a:t>김영식</a:t>
+            </a:r>
+          </a:p>
+        </p:txBody>
+      </p:sp>
+      <p:sp>
+        <p:nvSpPr>
+          <p:cNvPr id="5" name="슬라이드 번호 개체 틀 4">
+            <a:extLst>
+              <a:ext uri="{FF2B5EF4-FFF2-40B4-BE49-F238E27FC236}">
+                <a16:creationId xmlns:a16="http://schemas.microsoft.com/office/drawing/2014/main" id="{D38A8FAC-B0A7-9067-B3B1-F88099F5DA4A}"/>
+              </a:ext>
+            </a:extLst>
+          </p:cNvPr>
+          <p:cNvSpPr>
+            <a:spLocks noGrp="1"/>
+          </p:cNvSpPr>
+          <p:nvPr>
+            <p:ph type="sldNum" sz="quarter" idx="12"/>
+          </p:nvPr>
+        </p:nvSpPr>
+        <p:spPr/>
+        <p:txBody>
+          <a:bodyPr/>
+          <a:lstStyle/>
+          <a:p>
+            <a:pPr>
+              <a:defRPr/>
+            </a:pPr>
+            <a:fld id="{A268DA64-E15D-4814-A1DA-86D92D550423}" type="slidenum">
+              <a:rPr lang="ko-KR" altLang="en-US" smtClean="0"/>
+              <a:pPr>
+                <a:defRPr/>
+              </a:pPr>
+              <a:t>14</a:t>
+            </a:fld>
+            <a:endParaRPr lang="ko-KR" altLang="en-US"/>
+          </a:p>
+        </p:txBody>
+      </p:sp>
+      <p:pic>
+        <p:nvPicPr>
+          <p:cNvPr id="9" name="그림 8">
+            <a:extLst>
+              <a:ext uri="{FF2B5EF4-FFF2-40B4-BE49-F238E27FC236}">
+                <a16:creationId xmlns:a16="http://schemas.microsoft.com/office/drawing/2014/main" id="{490B2B52-BC60-7B90-46AD-6D045A51B7FD}"/>
+              </a:ext>
+            </a:extLst>
+          </p:cNvPr>
+          <p:cNvPicPr>
+            <a:picLocks noChangeAspect="1"/>
+          </p:cNvPicPr>
+          <p:nvPr/>
+        </p:nvPicPr>
+        <p:blipFill>
+          <a:blip r:embed="rId3"/>
+          <a:stretch>
+            <a:fillRect/>
+          </a:stretch>
+        </p:blipFill>
+        <p:spPr>
+          <a:xfrm>
+            <a:off x="755576" y="1902842"/>
+            <a:ext cx="2990505" cy="4421936"/>
+          </a:xfrm>
+          <a:prstGeom prst="rect">
+            <a:avLst/>
+          </a:prstGeom>
+        </p:spPr>
+      </p:pic>
+      <p:pic>
+        <p:nvPicPr>
+          <p:cNvPr id="11" name="그림 10">
+            <a:extLst>
+              <a:ext uri="{FF2B5EF4-FFF2-40B4-BE49-F238E27FC236}">
+                <a16:creationId xmlns:a16="http://schemas.microsoft.com/office/drawing/2014/main" id="{6A95EED3-D9E2-5DC4-9B27-AF18B5D30987}"/>
+              </a:ext>
+            </a:extLst>
+          </p:cNvPr>
+          <p:cNvPicPr>
+            <a:picLocks noChangeAspect="1"/>
+          </p:cNvPicPr>
+          <p:nvPr/>
+        </p:nvPicPr>
+        <p:blipFill>
+          <a:blip r:embed="rId4"/>
+          <a:stretch>
+            <a:fillRect/>
+          </a:stretch>
+        </p:blipFill>
+        <p:spPr>
+          <a:xfrm>
+            <a:off x="4565374" y="2060848"/>
+            <a:ext cx="3253523" cy="3598503"/>
+          </a:xfrm>
+          <a:prstGeom prst="rect">
+            <a:avLst/>
+          </a:prstGeom>
+        </p:spPr>
+      </p:pic>
+    </p:spTree>
+    <p:extLst>
+      <p:ext uri="{BB962C8B-B14F-4D97-AF65-F5344CB8AC3E}">
+        <p14:creationId xmlns:p14="http://schemas.microsoft.com/office/powerpoint/2010/main" val="1647522786"/>
+      </p:ext>
+    </p:extLst>
+  </p:cSld>
+  <p:clrMapOvr>
+    <a:masterClrMapping/>
+  </p:clrMapOvr>
+</p:sld>
+</file>
+
+<file path=ppt/slides/slide15.xml><?xml version="1.0" encoding="utf-8"?>
 <p:sld xmlns:a="http://schemas.openxmlformats.org/drawingml/2006/main" xmlns:r="http://schemas.openxmlformats.org/officeDocument/2006/relationships" xmlns:p="http://schemas.openxmlformats.org/presentationml/2006/main">
   <p:cSld>
     <p:spTree>
@@ -8220,7 +9069,7 @@
               <a:pPr>
                 <a:defRPr/>
               </a:pPr>
-              <a:t>12</a:t>
+              <a:t>15</a:t>
             </a:fld>
             <a:endParaRPr lang="ko-KR" altLang="en-US"/>
           </a:p>
@@ -8316,7 +9165,7 @@
 </p:sld>
 </file>
 
-<file path=ppt/slides/slide13.xml><?xml version="1.0" encoding="utf-8"?>
+<file path=ppt/slides/slide16.xml><?xml version="1.0" encoding="utf-8"?>
 <p:sld xmlns:a="http://schemas.openxmlformats.org/drawingml/2006/main" xmlns:r="http://schemas.openxmlformats.org/officeDocument/2006/relationships" xmlns:p="http://schemas.openxmlformats.org/presentationml/2006/main">
   <p:cSld>
     <p:spTree>
@@ -8355,7 +9204,12 @@
             <p:ph type="title"/>
           </p:nvPr>
         </p:nvSpPr>
-        <p:spPr/>
+        <p:spPr>
+          <a:xfrm>
+            <a:off x="451655" y="297664"/>
+            <a:ext cx="8229600" cy="868346"/>
+          </a:xfrm>
+        </p:spPr>
         <p:txBody>
           <a:bodyPr/>
           <a:lstStyle/>
@@ -8780,7 +9634,7 @@
               <a:pPr>
                 <a:defRPr/>
               </a:pPr>
-              <a:t>13</a:t>
+              <a:t>16</a:t>
             </a:fld>
             <a:endParaRPr lang="ko-KR" altLang="en-US"/>
           </a:p>
@@ -8837,6 +9691,311 @@
     <p:extLst>
       <p:ext uri="{BB962C8B-B14F-4D97-AF65-F5344CB8AC3E}">
         <p14:creationId xmlns:p14="http://schemas.microsoft.com/office/powerpoint/2010/main" val="2107914604"/>
+      </p:ext>
+    </p:extLst>
+  </p:cSld>
+  <p:clrMapOvr>
+    <a:masterClrMapping/>
+  </p:clrMapOvr>
+</p:sld>
+</file>
+
+<file path=ppt/slides/slide17.xml><?xml version="1.0" encoding="utf-8"?>
+<p:sld xmlns:a="http://schemas.openxmlformats.org/drawingml/2006/main" xmlns:r="http://schemas.openxmlformats.org/officeDocument/2006/relationships" xmlns:p="http://schemas.openxmlformats.org/presentationml/2006/main">
+  <p:cSld>
+    <p:spTree>
+      <p:nvGrpSpPr>
+        <p:cNvPr id="1" name=""/>
+        <p:cNvGrpSpPr/>
+        <p:nvPr/>
+      </p:nvGrpSpPr>
+      <p:grpSpPr>
+        <a:xfrm>
+          <a:off x="0" y="0"/>
+          <a:ext cx="0" cy="0"/>
+          <a:chOff x="0" y="0"/>
+          <a:chExt cx="0" cy="0"/>
+        </a:xfrm>
+      </p:grpSpPr>
+      <p:sp>
+        <p:nvSpPr>
+          <p:cNvPr id="2" name="제목 1">
+            <a:extLst>
+              <a:ext uri="{FF2B5EF4-FFF2-40B4-BE49-F238E27FC236}">
+                <a16:creationId xmlns:a16="http://schemas.microsoft.com/office/drawing/2014/main" id="{F29E810E-65C7-94A2-EFD5-37651E9541B3}"/>
+              </a:ext>
+            </a:extLst>
+          </p:cNvPr>
+          <p:cNvSpPr>
+            <a:spLocks noGrp="1"/>
+          </p:cNvSpPr>
+          <p:nvPr>
+            <p:ph type="title"/>
+          </p:nvPr>
+        </p:nvSpPr>
+        <p:spPr>
+          <a:xfrm>
+            <a:off x="457200" y="274638"/>
+            <a:ext cx="8229600" cy="562074"/>
+          </a:xfrm>
+        </p:spPr>
+        <p:txBody>
+          <a:bodyPr/>
+          <a:lstStyle/>
+          <a:p>
+            <a:r>
+              <a:rPr lang="en-US" altLang="ko-KR" dirty="0"/>
+              <a:t>7. </a:t>
+            </a:r>
+            <a:r>
+              <a:rPr lang="ko-KR" altLang="en-US" dirty="0"/>
+              <a:t>트리순회 </a:t>
+            </a:r>
+            <a:r>
+              <a:rPr lang="en-US" altLang="ko-KR" dirty="0"/>
+              <a:t>(</a:t>
+            </a:r>
+            <a:r>
+              <a:rPr lang="ko-KR" altLang="en-US" dirty="0"/>
+              <a:t>백준</a:t>
+            </a:r>
+            <a:r>
+              <a:rPr lang="en-US" altLang="ko-KR" dirty="0"/>
+              <a:t>, </a:t>
+            </a:r>
+            <a:r>
+              <a:rPr lang="ko-KR" altLang="en-US" dirty="0" err="1"/>
+              <a:t>이진트리순회</a:t>
+            </a:r>
+            <a:r>
+              <a:rPr lang="en-US" altLang="ko-KR" dirty="0"/>
+              <a:t>)</a:t>
+            </a:r>
+            <a:endParaRPr lang="ko-KR" altLang="en-US" dirty="0"/>
+          </a:p>
+        </p:txBody>
+      </p:sp>
+      <p:pic>
+        <p:nvPicPr>
+          <p:cNvPr id="7" name="내용 개체 틀 6">
+            <a:extLst>
+              <a:ext uri="{FF2B5EF4-FFF2-40B4-BE49-F238E27FC236}">
+                <a16:creationId xmlns:a16="http://schemas.microsoft.com/office/drawing/2014/main" id="{3ECA8276-7180-014F-2844-37F7D6E4EDBD}"/>
+              </a:ext>
+            </a:extLst>
+          </p:cNvPr>
+          <p:cNvPicPr>
+            <a:picLocks noGrp="1" noChangeAspect="1"/>
+          </p:cNvPicPr>
+          <p:nvPr>
+            <p:ph idx="1"/>
+          </p:nvPr>
+        </p:nvPicPr>
+        <p:blipFill>
+          <a:blip r:embed="rId2"/>
+          <a:stretch>
+            <a:fillRect/>
+          </a:stretch>
+        </p:blipFill>
+        <p:spPr bwMode="auto">
+          <a:xfrm>
+            <a:off x="457200" y="916129"/>
+            <a:ext cx="8229600" cy="974475"/>
+          </a:xfrm>
+          <a:prstGeom prst="rect">
+            <a:avLst/>
+          </a:prstGeom>
+          <a:noFill/>
+          <a:ln>
+            <a:noFill/>
+          </a:ln>
+          <a:extLst>
+            <a:ext uri="{909E8E84-426E-40DD-AFC4-6F175D3DCCD1}">
+              <a14:hiddenFill xmlns:a14="http://schemas.microsoft.com/office/drawing/2010/main">
+                <a:solidFill>
+                  <a:srgbClr val="FFFFFF"/>
+                </a:solidFill>
+              </a14:hiddenFill>
+            </a:ext>
+            <a:ext uri="{91240B29-F687-4F45-9708-019B960494DF}">
+              <a14:hiddenLine xmlns:a14="http://schemas.microsoft.com/office/drawing/2010/main" w="9525">
+                <a:solidFill>
+                  <a:srgbClr val="000000"/>
+                </a:solidFill>
+                <a:miter lim="800000"/>
+                <a:headEnd/>
+                <a:tailEnd/>
+              </a14:hiddenLine>
+            </a:ext>
+          </a:extLst>
+        </p:spPr>
+      </p:pic>
+      <p:sp>
+        <p:nvSpPr>
+          <p:cNvPr id="4" name="날짜 개체 틀 3">
+            <a:extLst>
+              <a:ext uri="{FF2B5EF4-FFF2-40B4-BE49-F238E27FC236}">
+                <a16:creationId xmlns:a16="http://schemas.microsoft.com/office/drawing/2014/main" id="{77C804F2-E5FA-EBC1-EADF-8037D61F8938}"/>
+              </a:ext>
+            </a:extLst>
+          </p:cNvPr>
+          <p:cNvSpPr>
+            <a:spLocks noGrp="1"/>
+          </p:cNvSpPr>
+          <p:nvPr>
+            <p:ph type="dt" sz="half" idx="10"/>
+          </p:nvPr>
+        </p:nvSpPr>
+        <p:spPr/>
+        <p:txBody>
+          <a:bodyPr/>
+          <a:lstStyle/>
+          <a:p>
+            <a:pPr>
+              <a:defRPr/>
+            </a:pPr>
+            <a:r>
+              <a:rPr lang="en-US" altLang="ko-KR"/>
+              <a:t>2008</a:t>
+            </a:r>
+            <a:r>
+              <a:rPr lang="ko-KR" altLang="en-US"/>
+              <a:t>년</a:t>
+            </a:r>
+            <a:r>
+              <a:rPr lang="en-US" altLang="ko-KR"/>
+              <a:t>2</a:t>
+            </a:r>
+            <a:r>
+              <a:rPr lang="ko-KR" altLang="en-US"/>
+              <a:t>학기 </a:t>
+            </a:r>
+            <a:r>
+              <a:rPr lang="en-US" altLang="ko-KR"/>
+              <a:t>3D</a:t>
+            </a:r>
+            <a:r>
+              <a:rPr lang="ko-KR" altLang="en-US"/>
+              <a:t>게임프로그래밍</a:t>
+            </a:r>
+            <a:r>
+              <a:rPr lang="en-US" altLang="ko-KR"/>
+              <a:t>II </a:t>
+            </a:r>
+            <a:r>
+              <a:rPr lang="ko-KR" altLang="en-US"/>
+              <a:t>담당교수</a:t>
+            </a:r>
+            <a:r>
+              <a:rPr lang="en-US" altLang="ko-KR"/>
+              <a:t>:</a:t>
+            </a:r>
+            <a:r>
+              <a:rPr lang="ko-KR" altLang="en-US"/>
+              <a:t>김영식</a:t>
+            </a:r>
+          </a:p>
+        </p:txBody>
+      </p:sp>
+      <p:sp>
+        <p:nvSpPr>
+          <p:cNvPr id="5" name="슬라이드 번호 개체 틀 4">
+            <a:extLst>
+              <a:ext uri="{FF2B5EF4-FFF2-40B4-BE49-F238E27FC236}">
+                <a16:creationId xmlns:a16="http://schemas.microsoft.com/office/drawing/2014/main" id="{5809963E-0A29-0726-A9C2-DD6DE7EA2CAB}"/>
+              </a:ext>
+            </a:extLst>
+          </p:cNvPr>
+          <p:cNvSpPr>
+            <a:spLocks noGrp="1"/>
+          </p:cNvSpPr>
+          <p:nvPr>
+            <p:ph type="sldNum" sz="quarter" idx="12"/>
+          </p:nvPr>
+        </p:nvSpPr>
+        <p:spPr/>
+        <p:txBody>
+          <a:bodyPr/>
+          <a:lstStyle/>
+          <a:p>
+            <a:pPr>
+              <a:defRPr/>
+            </a:pPr>
+            <a:fld id="{A268DA64-E15D-4814-A1DA-86D92D550423}" type="slidenum">
+              <a:rPr lang="ko-KR" altLang="en-US" smtClean="0"/>
+              <a:pPr>
+                <a:defRPr/>
+              </a:pPr>
+              <a:t>17</a:t>
+            </a:fld>
+            <a:endParaRPr lang="ko-KR" altLang="en-US"/>
+          </a:p>
+        </p:txBody>
+      </p:sp>
+      <p:pic>
+        <p:nvPicPr>
+          <p:cNvPr id="9" name="그림 8">
+            <a:extLst>
+              <a:ext uri="{FF2B5EF4-FFF2-40B4-BE49-F238E27FC236}">
+                <a16:creationId xmlns:a16="http://schemas.microsoft.com/office/drawing/2014/main" id="{4EE55E82-F079-019B-A8F0-6332CFBD642A}"/>
+              </a:ext>
+            </a:extLst>
+          </p:cNvPr>
+          <p:cNvPicPr>
+            <a:picLocks noChangeAspect="1"/>
+          </p:cNvPicPr>
+          <p:nvPr/>
+        </p:nvPicPr>
+        <p:blipFill>
+          <a:blip r:embed="rId3"/>
+          <a:stretch>
+            <a:fillRect/>
+          </a:stretch>
+        </p:blipFill>
+        <p:spPr>
+          <a:xfrm>
+            <a:off x="1115616" y="1970021"/>
+            <a:ext cx="3091576" cy="4260710"/>
+          </a:xfrm>
+          <a:prstGeom prst="rect">
+            <a:avLst/>
+          </a:prstGeom>
+        </p:spPr>
+      </p:pic>
+      <p:pic>
+        <p:nvPicPr>
+          <p:cNvPr id="11" name="그림 10">
+            <a:extLst>
+              <a:ext uri="{FF2B5EF4-FFF2-40B4-BE49-F238E27FC236}">
+                <a16:creationId xmlns:a16="http://schemas.microsoft.com/office/drawing/2014/main" id="{5766AA9F-D24A-ACAD-5970-83446A6F7CCC}"/>
+              </a:ext>
+            </a:extLst>
+          </p:cNvPr>
+          <p:cNvPicPr>
+            <a:picLocks noChangeAspect="1"/>
+          </p:cNvPicPr>
+          <p:nvPr/>
+        </p:nvPicPr>
+        <p:blipFill>
+          <a:blip r:embed="rId4"/>
+          <a:stretch>
+            <a:fillRect/>
+          </a:stretch>
+        </p:blipFill>
+        <p:spPr>
+          <a:xfrm>
+            <a:off x="4572000" y="1962161"/>
+            <a:ext cx="3317136" cy="4621201"/>
+          </a:xfrm>
+          <a:prstGeom prst="rect">
+            <a:avLst/>
+          </a:prstGeom>
+        </p:spPr>
+      </p:pic>
+    </p:spTree>
+    <p:extLst>
+      <p:ext uri="{BB962C8B-B14F-4D97-AF65-F5344CB8AC3E}">
+        <p14:creationId xmlns:p14="http://schemas.microsoft.com/office/powerpoint/2010/main" val="3164674512"/>
       </p:ext>
     </p:extLst>
   </p:cSld>
@@ -10671,6 +11830,298 @@
   <p:cSld>
     <p:spTree>
       <p:nvGrpSpPr>
+        <p:cNvPr id="1" name=""/>
+        <p:cNvGrpSpPr/>
+        <p:nvPr/>
+      </p:nvGrpSpPr>
+      <p:grpSpPr>
+        <a:xfrm>
+          <a:off x="0" y="0"/>
+          <a:ext cx="0" cy="0"/>
+          <a:chOff x="0" y="0"/>
+          <a:chExt cx="0" cy="0"/>
+        </a:xfrm>
+      </p:grpSpPr>
+      <p:sp>
+        <p:nvSpPr>
+          <p:cNvPr id="2" name="제목 1">
+            <a:extLst>
+              <a:ext uri="{FF2B5EF4-FFF2-40B4-BE49-F238E27FC236}">
+                <a16:creationId xmlns:a16="http://schemas.microsoft.com/office/drawing/2014/main" id="{9C758AE8-7420-C006-47A9-9C976BEA1552}"/>
+              </a:ext>
+            </a:extLst>
+          </p:cNvPr>
+          <p:cNvSpPr>
+            <a:spLocks noGrp="1"/>
+          </p:cNvSpPr>
+          <p:nvPr>
+            <p:ph type="title"/>
+          </p:nvPr>
+        </p:nvSpPr>
+        <p:spPr/>
+        <p:txBody>
+          <a:bodyPr/>
+          <a:lstStyle/>
+          <a:p>
+            <a:r>
+              <a:rPr lang="en-US" altLang="ko-KR" dirty="0"/>
+              <a:t>1. DFS</a:t>
+            </a:r>
+            <a:r>
+              <a:rPr lang="ko-KR" altLang="en-US" dirty="0"/>
+              <a:t>와 </a:t>
+            </a:r>
+            <a:r>
+              <a:rPr lang="en-US" altLang="ko-KR" dirty="0"/>
+              <a:t>BFS (</a:t>
+            </a:r>
+            <a:r>
+              <a:rPr lang="ko-KR" altLang="en-US" dirty="0"/>
+              <a:t>백준</a:t>
+            </a:r>
+            <a:r>
+              <a:rPr lang="en-US" altLang="ko-KR" dirty="0"/>
+              <a:t>)</a:t>
+            </a:r>
+            <a:endParaRPr lang="ko-KR" altLang="en-US" dirty="0"/>
+          </a:p>
+        </p:txBody>
+      </p:sp>
+      <p:pic>
+        <p:nvPicPr>
+          <p:cNvPr id="9" name="내용 개체 틀 8">
+            <a:extLst>
+              <a:ext uri="{FF2B5EF4-FFF2-40B4-BE49-F238E27FC236}">
+                <a16:creationId xmlns:a16="http://schemas.microsoft.com/office/drawing/2014/main" id="{D3730013-E5B6-DB9B-B364-35FE964E938A}"/>
+              </a:ext>
+            </a:extLst>
+          </p:cNvPr>
+          <p:cNvPicPr>
+            <a:picLocks noGrp="1" noChangeAspect="1"/>
+          </p:cNvPicPr>
+          <p:nvPr>
+            <p:ph idx="1"/>
+          </p:nvPr>
+        </p:nvPicPr>
+        <p:blipFill>
+          <a:blip r:embed="rId2"/>
+          <a:stretch>
+            <a:fillRect/>
+          </a:stretch>
+        </p:blipFill>
+        <p:spPr bwMode="auto">
+          <a:xfrm>
+            <a:off x="1629412" y="1189757"/>
+            <a:ext cx="2120259" cy="3888432"/>
+          </a:xfrm>
+          <a:prstGeom prst="rect">
+            <a:avLst/>
+          </a:prstGeom>
+          <a:noFill/>
+          <a:ln>
+            <a:noFill/>
+          </a:ln>
+          <a:extLst>
+            <a:ext uri="{909E8E84-426E-40DD-AFC4-6F175D3DCCD1}">
+              <a14:hiddenFill xmlns:a14="http://schemas.microsoft.com/office/drawing/2010/main">
+                <a:solidFill>
+                  <a:srgbClr val="FFFFFF"/>
+                </a:solidFill>
+              </a14:hiddenFill>
+            </a:ext>
+            <a:ext uri="{91240B29-F687-4F45-9708-019B960494DF}">
+              <a14:hiddenLine xmlns:a14="http://schemas.microsoft.com/office/drawing/2010/main" w="9525">
+                <a:solidFill>
+                  <a:srgbClr val="000000"/>
+                </a:solidFill>
+                <a:miter lim="800000"/>
+                <a:headEnd/>
+                <a:tailEnd/>
+              </a14:hiddenLine>
+            </a:ext>
+          </a:extLst>
+        </p:spPr>
+      </p:pic>
+      <p:sp>
+        <p:nvSpPr>
+          <p:cNvPr id="4" name="날짜 개체 틀 3">
+            <a:extLst>
+              <a:ext uri="{FF2B5EF4-FFF2-40B4-BE49-F238E27FC236}">
+                <a16:creationId xmlns:a16="http://schemas.microsoft.com/office/drawing/2014/main" id="{08F1C19F-3977-7719-016D-EFF5AF94BCFE}"/>
+              </a:ext>
+            </a:extLst>
+          </p:cNvPr>
+          <p:cNvSpPr>
+            <a:spLocks noGrp="1"/>
+          </p:cNvSpPr>
+          <p:nvPr>
+            <p:ph type="dt" sz="half" idx="10"/>
+          </p:nvPr>
+        </p:nvSpPr>
+        <p:spPr/>
+        <p:txBody>
+          <a:bodyPr/>
+          <a:lstStyle/>
+          <a:p>
+            <a:pPr>
+              <a:defRPr/>
+            </a:pPr>
+            <a:r>
+              <a:rPr lang="en-US" altLang="ko-KR"/>
+              <a:t>2008</a:t>
+            </a:r>
+            <a:r>
+              <a:rPr lang="ko-KR" altLang="en-US"/>
+              <a:t>년</a:t>
+            </a:r>
+            <a:r>
+              <a:rPr lang="en-US" altLang="ko-KR"/>
+              <a:t>2</a:t>
+            </a:r>
+            <a:r>
+              <a:rPr lang="ko-KR" altLang="en-US"/>
+              <a:t>학기 </a:t>
+            </a:r>
+            <a:r>
+              <a:rPr lang="en-US" altLang="ko-KR"/>
+              <a:t>3D</a:t>
+            </a:r>
+            <a:r>
+              <a:rPr lang="ko-KR" altLang="en-US"/>
+              <a:t>게임프로그래밍</a:t>
+            </a:r>
+            <a:r>
+              <a:rPr lang="en-US" altLang="ko-KR"/>
+              <a:t>II </a:t>
+            </a:r>
+            <a:r>
+              <a:rPr lang="ko-KR" altLang="en-US"/>
+              <a:t>담당교수</a:t>
+            </a:r>
+            <a:r>
+              <a:rPr lang="en-US" altLang="ko-KR"/>
+              <a:t>:</a:t>
+            </a:r>
+            <a:r>
+              <a:rPr lang="ko-KR" altLang="en-US"/>
+              <a:t>김영식</a:t>
+            </a:r>
+          </a:p>
+        </p:txBody>
+      </p:sp>
+      <p:sp>
+        <p:nvSpPr>
+          <p:cNvPr id="5" name="슬라이드 번호 개체 틀 4">
+            <a:extLst>
+              <a:ext uri="{FF2B5EF4-FFF2-40B4-BE49-F238E27FC236}">
+                <a16:creationId xmlns:a16="http://schemas.microsoft.com/office/drawing/2014/main" id="{169BCD15-2094-02E3-178F-46E5B2759294}"/>
+              </a:ext>
+            </a:extLst>
+          </p:cNvPr>
+          <p:cNvSpPr>
+            <a:spLocks noGrp="1"/>
+          </p:cNvSpPr>
+          <p:nvPr>
+            <p:ph type="sldNum" sz="quarter" idx="12"/>
+          </p:nvPr>
+        </p:nvSpPr>
+        <p:spPr/>
+        <p:txBody>
+          <a:bodyPr/>
+          <a:lstStyle/>
+          <a:p>
+            <a:pPr>
+              <a:defRPr/>
+            </a:pPr>
+            <a:fld id="{A268DA64-E15D-4814-A1DA-86D92D550423}" type="slidenum">
+              <a:rPr lang="ko-KR" altLang="en-US" smtClean="0"/>
+              <a:pPr>
+                <a:defRPr/>
+              </a:pPr>
+              <a:t>6</a:t>
+            </a:fld>
+            <a:endParaRPr lang="ko-KR" altLang="en-US"/>
+          </a:p>
+        </p:txBody>
+      </p:sp>
+      <p:pic>
+        <p:nvPicPr>
+          <p:cNvPr id="11" name="그림 10">
+            <a:extLst>
+              <a:ext uri="{FF2B5EF4-FFF2-40B4-BE49-F238E27FC236}">
+                <a16:creationId xmlns:a16="http://schemas.microsoft.com/office/drawing/2014/main" id="{FA0F147D-E63E-7631-237D-B036A6A93F14}"/>
+              </a:ext>
+            </a:extLst>
+          </p:cNvPr>
+          <p:cNvPicPr>
+            <a:picLocks noChangeAspect="1"/>
+          </p:cNvPicPr>
+          <p:nvPr/>
+        </p:nvPicPr>
+        <p:blipFill>
+          <a:blip r:embed="rId3"/>
+          <a:stretch>
+            <a:fillRect/>
+          </a:stretch>
+        </p:blipFill>
+        <p:spPr>
+          <a:xfrm>
+            <a:off x="4921883" y="1052736"/>
+            <a:ext cx="2245193" cy="4162474"/>
+          </a:xfrm>
+          <a:prstGeom prst="rect">
+            <a:avLst/>
+          </a:prstGeom>
+        </p:spPr>
+      </p:pic>
+      <p:pic>
+        <p:nvPicPr>
+          <p:cNvPr id="13" name="그림 12">
+            <a:extLst>
+              <a:ext uri="{FF2B5EF4-FFF2-40B4-BE49-F238E27FC236}">
+                <a16:creationId xmlns:a16="http://schemas.microsoft.com/office/drawing/2014/main" id="{93D427B1-7253-82EF-EBBA-9A38EDE6F75D}"/>
+              </a:ext>
+            </a:extLst>
+          </p:cNvPr>
+          <p:cNvPicPr>
+            <a:picLocks noChangeAspect="1"/>
+          </p:cNvPicPr>
+          <p:nvPr/>
+        </p:nvPicPr>
+        <p:blipFill>
+          <a:blip r:embed="rId4"/>
+          <a:stretch>
+            <a:fillRect/>
+          </a:stretch>
+        </p:blipFill>
+        <p:spPr>
+          <a:xfrm>
+            <a:off x="396044" y="5356023"/>
+            <a:ext cx="8351912" cy="1365452"/>
+          </a:xfrm>
+          <a:prstGeom prst="rect">
+            <a:avLst/>
+          </a:prstGeom>
+        </p:spPr>
+      </p:pic>
+    </p:spTree>
+    <p:extLst>
+      <p:ext uri="{BB962C8B-B14F-4D97-AF65-F5344CB8AC3E}">
+        <p14:creationId xmlns:p14="http://schemas.microsoft.com/office/powerpoint/2010/main" val="2959844933"/>
+      </p:ext>
+    </p:extLst>
+  </p:cSld>
+  <p:clrMapOvr>
+    <a:masterClrMapping/>
+  </p:clrMapOvr>
+</p:sld>
+</file>
+
+<file path=ppt/slides/slide7.xml><?xml version="1.0" encoding="utf-8"?>
+<p:sld xmlns:a="http://schemas.openxmlformats.org/drawingml/2006/main" xmlns:r="http://schemas.openxmlformats.org/officeDocument/2006/relationships" xmlns:p="http://schemas.openxmlformats.org/presentationml/2006/main">
+  <p:cSld>
+    <p:spTree>
+      <p:nvGrpSpPr>
         <p:cNvPr id="1" name="">
           <a:extLst>
             <a:ext uri="{FF2B5EF4-FFF2-40B4-BE49-F238E27FC236}">
@@ -11064,7 +12515,7 @@
               <a:pPr>
                 <a:defRPr/>
               </a:pPr>
-              <a:t>6</a:t>
+              <a:t>7</a:t>
             </a:fld>
             <a:endParaRPr lang="ko-KR" altLang="en-US"/>
           </a:p>
@@ -11113,7 +12564,7 @@
 </p:sld>
 </file>
 
-<file path=ppt/slides/slide7.xml><?xml version="1.0" encoding="utf-8"?>
+<file path=ppt/slides/slide8.xml><?xml version="1.0" encoding="utf-8"?>
 <p:sld xmlns:a="http://schemas.openxmlformats.org/drawingml/2006/main" xmlns:r="http://schemas.openxmlformats.org/officeDocument/2006/relationships" xmlns:p="http://schemas.openxmlformats.org/presentationml/2006/main">
   <p:cSld>
     <p:spTree>
@@ -11493,7 +12944,7 @@
               <a:pPr>
                 <a:defRPr/>
               </a:pPr>
-              <a:t>7</a:t>
+              <a:t>8</a:t>
             </a:fld>
             <a:endParaRPr lang="ko-KR" altLang="en-US"/>
           </a:p>
@@ -11559,7 +13010,7 @@
 </p:sld>
 </file>
 
-<file path=ppt/slides/slide8.xml><?xml version="1.0" encoding="utf-8"?>
+<file path=ppt/slides/slide9.xml><?xml version="1.0" encoding="utf-8"?>
 <p:sld xmlns:a="http://schemas.openxmlformats.org/drawingml/2006/main" xmlns:r="http://schemas.openxmlformats.org/officeDocument/2006/relationships" xmlns:p="http://schemas.openxmlformats.org/presentationml/2006/main">
   <p:cSld>
     <p:spTree>
@@ -11780,7 +13231,7 @@
               <a:pPr>
                 <a:defRPr/>
               </a:pPr>
-              <a:t>8</a:t>
+              <a:t>9</a:t>
             </a:fld>
             <a:endParaRPr lang="ko-KR" altLang="en-US"/>
           </a:p>
@@ -11790,276 +13241,6 @@
     <p:extLst>
       <p:ext uri="{BB962C8B-B14F-4D97-AF65-F5344CB8AC3E}">
         <p14:creationId xmlns:p14="http://schemas.microsoft.com/office/powerpoint/2010/main" val="3121582175"/>
-      </p:ext>
-    </p:extLst>
-  </p:cSld>
-  <p:clrMapOvr>
-    <a:masterClrMapping/>
-  </p:clrMapOvr>
-</p:sld>
-</file>
-
-<file path=ppt/slides/slide9.xml><?xml version="1.0" encoding="utf-8"?>
-<p:sld xmlns:a="http://schemas.openxmlformats.org/drawingml/2006/main" xmlns:r="http://schemas.openxmlformats.org/officeDocument/2006/relationships" xmlns:p="http://schemas.openxmlformats.org/presentationml/2006/main">
-  <p:cSld>
-    <p:spTree>
-      <p:nvGrpSpPr>
-        <p:cNvPr id="1" name=""/>
-        <p:cNvGrpSpPr/>
-        <p:nvPr/>
-      </p:nvGrpSpPr>
-      <p:grpSpPr>
-        <a:xfrm>
-          <a:off x="0" y="0"/>
-          <a:ext cx="0" cy="0"/>
-          <a:chOff x="0" y="0"/>
-          <a:chExt cx="0" cy="0"/>
-        </a:xfrm>
-      </p:grpSpPr>
-      <p:sp>
-        <p:nvSpPr>
-          <p:cNvPr id="2" name="제목 1">
-            <a:extLst>
-              <a:ext uri="{FF2B5EF4-FFF2-40B4-BE49-F238E27FC236}">
-                <a16:creationId xmlns:a16="http://schemas.microsoft.com/office/drawing/2014/main" id="{BFE13D73-23DE-A052-A63D-D7AED4824A96}"/>
-              </a:ext>
-            </a:extLst>
-          </p:cNvPr>
-          <p:cNvSpPr>
-            <a:spLocks noGrp="1"/>
-          </p:cNvSpPr>
-          <p:nvPr>
-            <p:ph type="title"/>
-          </p:nvPr>
-        </p:nvSpPr>
-        <p:spPr/>
-        <p:txBody>
-          <a:bodyPr/>
-          <a:lstStyle/>
-          <a:p>
-            <a:r>
-              <a:rPr lang="en-US" altLang="ko-KR" dirty="0"/>
-              <a:t>3. </a:t>
-            </a:r>
-            <a:r>
-              <a:rPr lang="ko-KR" altLang="en-US" dirty="0"/>
-              <a:t>중요한 교차로 </a:t>
-            </a:r>
-            <a:r>
-              <a:rPr lang="en-US" altLang="ko-KR" dirty="0"/>
-              <a:t>(</a:t>
-            </a:r>
-            <a:r>
-              <a:rPr lang="en-US" altLang="ko-KR" dirty="0" err="1"/>
-              <a:t>TUKorea</a:t>
-            </a:r>
-            <a:r>
-              <a:rPr lang="en-US" altLang="ko-KR" dirty="0"/>
-              <a:t>, DFS/BFS</a:t>
-            </a:r>
-            <a:r>
-              <a:rPr lang="ko-KR" altLang="en-US" dirty="0"/>
-              <a:t>완전탐색</a:t>
-            </a:r>
-            <a:r>
-              <a:rPr lang="en-US" altLang="ko-KR" dirty="0"/>
-              <a:t>)</a:t>
-            </a:r>
-            <a:endParaRPr lang="ko-KR" altLang="en-US" dirty="0"/>
-          </a:p>
-        </p:txBody>
-      </p:sp>
-      <p:pic>
-        <p:nvPicPr>
-          <p:cNvPr id="7" name="내용 개체 틀 6">
-            <a:extLst>
-              <a:ext uri="{FF2B5EF4-FFF2-40B4-BE49-F238E27FC236}">
-                <a16:creationId xmlns:a16="http://schemas.microsoft.com/office/drawing/2014/main" id="{A30F3F89-2BB6-B309-8B73-F52FA5140DAD}"/>
-              </a:ext>
-            </a:extLst>
-          </p:cNvPr>
-          <p:cNvPicPr>
-            <a:picLocks noGrp="1" noChangeAspect="1"/>
-          </p:cNvPicPr>
-          <p:nvPr>
-            <p:ph idx="1"/>
-          </p:nvPr>
-        </p:nvPicPr>
-        <p:blipFill>
-          <a:blip r:embed="rId2"/>
-          <a:stretch>
-            <a:fillRect/>
-          </a:stretch>
-        </p:blipFill>
-        <p:spPr bwMode="auto">
-          <a:xfrm>
-            <a:off x="971600" y="1142984"/>
-            <a:ext cx="3474541" cy="4840288"/>
-          </a:xfrm>
-          <a:prstGeom prst="rect">
-            <a:avLst/>
-          </a:prstGeom>
-          <a:noFill/>
-          <a:ln>
-            <a:noFill/>
-          </a:ln>
-          <a:extLst>
-            <a:ext uri="{909E8E84-426E-40DD-AFC4-6F175D3DCCD1}">
-              <a14:hiddenFill xmlns:a14="http://schemas.microsoft.com/office/drawing/2010/main">
-                <a:solidFill>
-                  <a:srgbClr val="FFFFFF"/>
-                </a:solidFill>
-              </a14:hiddenFill>
-            </a:ext>
-            <a:ext uri="{91240B29-F687-4F45-9708-019B960494DF}">
-              <a14:hiddenLine xmlns:a14="http://schemas.microsoft.com/office/drawing/2010/main" w="9525">
-                <a:solidFill>
-                  <a:srgbClr val="000000"/>
-                </a:solidFill>
-                <a:miter lim="800000"/>
-                <a:headEnd/>
-                <a:tailEnd/>
-              </a14:hiddenLine>
-            </a:ext>
-          </a:extLst>
-        </p:spPr>
-      </p:pic>
-      <p:sp>
-        <p:nvSpPr>
-          <p:cNvPr id="4" name="날짜 개체 틀 3">
-            <a:extLst>
-              <a:ext uri="{FF2B5EF4-FFF2-40B4-BE49-F238E27FC236}">
-                <a16:creationId xmlns:a16="http://schemas.microsoft.com/office/drawing/2014/main" id="{50267631-2A3D-06FE-9C3C-B2AA5B3A7A84}"/>
-              </a:ext>
-            </a:extLst>
-          </p:cNvPr>
-          <p:cNvSpPr>
-            <a:spLocks noGrp="1"/>
-          </p:cNvSpPr>
-          <p:nvPr>
-            <p:ph type="dt" sz="half" idx="10"/>
-          </p:nvPr>
-        </p:nvSpPr>
-        <p:spPr/>
-        <p:txBody>
-          <a:bodyPr/>
-          <a:lstStyle/>
-          <a:p>
-            <a:pPr>
-              <a:defRPr/>
-            </a:pPr>
-            <a:r>
-              <a:rPr lang="en-US" altLang="ko-KR"/>
-              <a:t>2008</a:t>
-            </a:r>
-            <a:r>
-              <a:rPr lang="ko-KR" altLang="en-US"/>
-              <a:t>년</a:t>
-            </a:r>
-            <a:r>
-              <a:rPr lang="en-US" altLang="ko-KR"/>
-              <a:t>2</a:t>
-            </a:r>
-            <a:r>
-              <a:rPr lang="ko-KR" altLang="en-US"/>
-              <a:t>학기 </a:t>
-            </a:r>
-            <a:r>
-              <a:rPr lang="en-US" altLang="ko-KR"/>
-              <a:t>3D</a:t>
-            </a:r>
-            <a:r>
-              <a:rPr lang="ko-KR" altLang="en-US"/>
-              <a:t>게임프로그래밍</a:t>
-            </a:r>
-            <a:r>
-              <a:rPr lang="en-US" altLang="ko-KR"/>
-              <a:t>II </a:t>
-            </a:r>
-            <a:r>
-              <a:rPr lang="ko-KR" altLang="en-US"/>
-              <a:t>담당교수</a:t>
-            </a:r>
-            <a:r>
-              <a:rPr lang="en-US" altLang="ko-KR"/>
-              <a:t>:</a:t>
-            </a:r>
-            <a:r>
-              <a:rPr lang="ko-KR" altLang="en-US"/>
-              <a:t>김영식</a:t>
-            </a:r>
-          </a:p>
-        </p:txBody>
-      </p:sp>
-      <p:sp>
-        <p:nvSpPr>
-          <p:cNvPr id="5" name="슬라이드 번호 개체 틀 4">
-            <a:extLst>
-              <a:ext uri="{FF2B5EF4-FFF2-40B4-BE49-F238E27FC236}">
-                <a16:creationId xmlns:a16="http://schemas.microsoft.com/office/drawing/2014/main" id="{FD0E14D5-43FE-F8AE-47E9-6FEC757F62A2}"/>
-              </a:ext>
-            </a:extLst>
-          </p:cNvPr>
-          <p:cNvSpPr>
-            <a:spLocks noGrp="1"/>
-          </p:cNvSpPr>
-          <p:nvPr>
-            <p:ph type="sldNum" sz="quarter" idx="12"/>
-          </p:nvPr>
-        </p:nvSpPr>
-        <p:spPr/>
-        <p:txBody>
-          <a:bodyPr/>
-          <a:lstStyle/>
-          <a:p>
-            <a:pPr>
-              <a:defRPr/>
-            </a:pPr>
-            <a:fld id="{A268DA64-E15D-4814-A1DA-86D92D550423}" type="slidenum">
-              <a:rPr lang="ko-KR" altLang="en-US" smtClean="0"/>
-              <a:pPr>
-                <a:defRPr/>
-              </a:pPr>
-              <a:t>9</a:t>
-            </a:fld>
-            <a:endParaRPr lang="ko-KR" altLang="en-US"/>
-          </a:p>
-        </p:txBody>
-      </p:sp>
-      <p:pic>
-        <p:nvPicPr>
-          <p:cNvPr id="9" name="그림 8">
-            <a:extLst>
-              <a:ext uri="{FF2B5EF4-FFF2-40B4-BE49-F238E27FC236}">
-                <a16:creationId xmlns:a16="http://schemas.microsoft.com/office/drawing/2014/main" id="{7FE143F9-B5B7-8985-67B3-A1FF53494A65}"/>
-              </a:ext>
-            </a:extLst>
-          </p:cNvPr>
-          <p:cNvPicPr>
-            <a:picLocks noChangeAspect="1"/>
-          </p:cNvPicPr>
-          <p:nvPr/>
-        </p:nvPicPr>
-        <p:blipFill>
-          <a:blip r:embed="rId3"/>
-          <a:stretch>
-            <a:fillRect/>
-          </a:stretch>
-        </p:blipFill>
-        <p:spPr>
-          <a:xfrm>
-            <a:off x="4499992" y="2132856"/>
-            <a:ext cx="4336725" cy="3729730"/>
-          </a:xfrm>
-          <a:prstGeom prst="rect">
-            <a:avLst/>
-          </a:prstGeom>
-        </p:spPr>
-      </p:pic>
-    </p:spTree>
-    <p:extLst>
-      <p:ext uri="{BB962C8B-B14F-4D97-AF65-F5344CB8AC3E}">
-        <p14:creationId xmlns:p14="http://schemas.microsoft.com/office/powerpoint/2010/main" val="3719326584"/>
       </p:ext>
     </p:extLst>
   </p:cSld>
